--- a/dist/초6/국어/읽기와비판/초6_국어_읽기와비판_01_사실과의견_학생용.pptx
+++ b/dist/초6/국어/읽기와비판/초6_국어_읽기와비판_01_사실과의견_학생용.pptx
@@ -119,13 +119,13 @@
   <p:extLst>
     <p:ext uri="{521415D9-36F7-43E2-AB2F-B90AF26B5E84}">
       <p14:sectionLst xmlns:p14="http://schemas.microsoft.com/office/powerpoint/2010/main">
-        <p14:section name="도입" id="{80024d1d-cf1a-2b2a-7976-ae7870f05b3c}">
+        <p14:section name="도입" id="{69fe45f5-183e-7110-aebb-fca4a7f84faa}">
           <p14:sldIdLst>
             <p14:sldId id="256"/>
             <p14:sldId id="257"/>
           </p14:sldIdLst>
         </p14:section>
-        <p14:section name="개념" id="{23b663fd-7cd9-00e3-1588-0c7df9ce2fdb}">
+        <p14:section name="개념" id="{345566ff-3afc-b74b-5028-a47426261cbd}">
           <p14:sldIdLst>
             <p14:sldId id="258"/>
             <p14:sldId id="259"/>
@@ -133,25 +133,25 @@
             <p14:sldId id="261"/>
           </p14:sldIdLst>
         </p14:section>
-        <p14:section name="연습" id="{ea4e9846-3d54-3e60-9279-7b905d006999}">
+        <p14:section name="연습" id="{8873879e-dce5-4511-4563-97980f88ce62}">
           <p14:sldIdLst>
             <p14:sldId id="262"/>
             <p14:sldId id="263"/>
             <p14:sldId id="264"/>
           </p14:sldIdLst>
         </p14:section>
-        <p14:section name="확인" id="{d984de0d-98db-218b-76db-16c0e1a675d6}">
+        <p14:section name="확인" id="{75fa8dd2-dbe2-d0ca-9527-a0bef1c87bd2}">
           <p14:sldIdLst>
             <p14:sldId id="265"/>
             <p14:sldId id="266"/>
           </p14:sldIdLst>
         </p14:section>
-        <p14:section name="정리" id="{0c1370f8-a540-a849-7daa-0e00ece3f3c0}">
+        <p14:section name="정리" id="{b90d1e9f-f329-771f-e1f1-093ca012394d}">
           <p14:sldIdLst>
             <p14:sldId id="267"/>
           </p14:sldIdLst>
         </p14:section>
-        <p14:section name="보충" id="{c82f69ed-a140-04de-7304-6386cefbf627}">
+        <p14:section name="보충" id="{629c251b-d01a-7dde-4ee2-a20785bc02f3}">
           <p14:sldIdLst>
             <p14:sldId id="268"/>
           </p14:sldIdLst>
@@ -6782,7 +6782,7 @@
           </p:nvPr>
         </p:nvGraphicFramePr>
         <p:xfrm>
-          <a:off x="608076" y="2350516"/>
+          <a:off x="608076" y="1964944"/>
           <a:ext cx="10972800" cy="914400"/>
         </p:xfrm>
         <a:graphic>
@@ -6793,7 +6793,7 @@
                 <a:gridCol w="5047488"/>
                 <a:gridCol w="5925312"/>
               </a:tblGrid>
-              <a:tr h="472440">
+              <a:tr h="481584">
                 <a:tc>
                   <a:txBody>
                     <a:bodyPr/>
@@ -6931,7 +6931,7 @@
                   </a:tcPr>
                 </a:tc>
               </a:tr>
-              <a:tr h="472440">
+              <a:tr h="853440">
                 <a:tc>
                   <a:txBody>
                     <a:bodyPr/>
@@ -7090,7 +7090,7 @@
                   </a:tcPr>
                 </a:tc>
               </a:tr>
-              <a:tr h="472440">
+              <a:tr h="853440">
                 <a:tc>
                   <a:txBody>
                     <a:bodyPr/>
